--- a/Fifohazana/Fifohazana 316.pptx
+++ b/Fifohazana/Fifohazana 316.pptx
@@ -310,7 +310,7 @@
             <a:fld id="{E1E9137A-D7C1-4F8C-A62B-C89ADD9F06F3}" type="datetimeFigureOut">
               <a:rPr lang="fr-FR" smtClean="0"/>
               <a:pPr/>
-              <a:t>12/03/2023</a:t>
+              <a:t>08/02/2026</a:t>
             </a:fld>
             <a:endParaRPr lang="fr-FR"/>
           </a:p>
@@ -475,7 +475,7 @@
             <a:fld id="{E1E9137A-D7C1-4F8C-A62B-C89ADD9F06F3}" type="datetimeFigureOut">
               <a:rPr lang="fr-FR" smtClean="0"/>
               <a:pPr/>
-              <a:t>12/03/2023</a:t>
+              <a:t>08/02/2026</a:t>
             </a:fld>
             <a:endParaRPr lang="fr-FR"/>
           </a:p>
@@ -650,7 +650,7 @@
             <a:fld id="{E1E9137A-D7C1-4F8C-A62B-C89ADD9F06F3}" type="datetimeFigureOut">
               <a:rPr lang="fr-FR" smtClean="0"/>
               <a:pPr/>
-              <a:t>12/03/2023</a:t>
+              <a:t>08/02/2026</a:t>
             </a:fld>
             <a:endParaRPr lang="fr-FR"/>
           </a:p>
@@ -815,7 +815,7 @@
             <a:fld id="{E1E9137A-D7C1-4F8C-A62B-C89ADD9F06F3}" type="datetimeFigureOut">
               <a:rPr lang="fr-FR" smtClean="0"/>
               <a:pPr/>
-              <a:t>12/03/2023</a:t>
+              <a:t>08/02/2026</a:t>
             </a:fld>
             <a:endParaRPr lang="fr-FR"/>
           </a:p>
@@ -1057,7 +1057,7 @@
             <a:fld id="{E1E9137A-D7C1-4F8C-A62B-C89ADD9F06F3}" type="datetimeFigureOut">
               <a:rPr lang="fr-FR" smtClean="0"/>
               <a:pPr/>
-              <a:t>12/03/2023</a:t>
+              <a:t>08/02/2026</a:t>
             </a:fld>
             <a:endParaRPr lang="fr-FR"/>
           </a:p>
@@ -1339,7 +1339,7 @@
             <a:fld id="{E1E9137A-D7C1-4F8C-A62B-C89ADD9F06F3}" type="datetimeFigureOut">
               <a:rPr lang="fr-FR" smtClean="0"/>
               <a:pPr/>
-              <a:t>12/03/2023</a:t>
+              <a:t>08/02/2026</a:t>
             </a:fld>
             <a:endParaRPr lang="fr-FR"/>
           </a:p>
@@ -1755,7 +1755,7 @@
             <a:fld id="{E1E9137A-D7C1-4F8C-A62B-C89ADD9F06F3}" type="datetimeFigureOut">
               <a:rPr lang="fr-FR" smtClean="0"/>
               <a:pPr/>
-              <a:t>12/03/2023</a:t>
+              <a:t>08/02/2026</a:t>
             </a:fld>
             <a:endParaRPr lang="fr-FR"/>
           </a:p>
@@ -1869,7 +1869,7 @@
             <a:fld id="{E1E9137A-D7C1-4F8C-A62B-C89ADD9F06F3}" type="datetimeFigureOut">
               <a:rPr lang="fr-FR" smtClean="0"/>
               <a:pPr/>
-              <a:t>12/03/2023</a:t>
+              <a:t>08/02/2026</a:t>
             </a:fld>
             <a:endParaRPr lang="fr-FR"/>
           </a:p>
@@ -1961,7 +1961,7 @@
             <a:fld id="{E1E9137A-D7C1-4F8C-A62B-C89ADD9F06F3}" type="datetimeFigureOut">
               <a:rPr lang="fr-FR" smtClean="0"/>
               <a:pPr/>
-              <a:t>12/03/2023</a:t>
+              <a:t>08/02/2026</a:t>
             </a:fld>
             <a:endParaRPr lang="fr-FR"/>
           </a:p>
@@ -2233,7 +2233,7 @@
             <a:fld id="{E1E9137A-D7C1-4F8C-A62B-C89ADD9F06F3}" type="datetimeFigureOut">
               <a:rPr lang="fr-FR" smtClean="0"/>
               <a:pPr/>
-              <a:t>12/03/2023</a:t>
+              <a:t>08/02/2026</a:t>
             </a:fld>
             <a:endParaRPr lang="fr-FR"/>
           </a:p>
@@ -2482,7 +2482,7 @@
             <a:fld id="{E1E9137A-D7C1-4F8C-A62B-C89ADD9F06F3}" type="datetimeFigureOut">
               <a:rPr lang="fr-FR" smtClean="0"/>
               <a:pPr/>
-              <a:t>12/03/2023</a:t>
+              <a:t>08/02/2026</a:t>
             </a:fld>
             <a:endParaRPr lang="fr-FR"/>
           </a:p>
@@ -2700,7 +2700,7 @@
             <a:fld id="{E1E9137A-D7C1-4F8C-A62B-C89ADD9F06F3}" type="datetimeFigureOut">
               <a:rPr lang="fr-FR" smtClean="0"/>
               <a:pPr/>
-              <a:t>12/03/2023</a:t>
+              <a:t>08/02/2026</a:t>
             </a:fld>
             <a:endParaRPr lang="fr-FR"/>
           </a:p>
@@ -3339,6 +3339,13 @@
   <p:clrMapOvr>
     <a:masterClrMapping/>
   </p:clrMapOvr>
+  <p:timing>
+    <p:tnLst>
+      <p:par>
+        <p:cTn id="1" dur="indefinite" restart="never" nodeType="tmRoot"/>
+      </p:par>
+    </p:tnLst>
+  </p:timing>
 </p:sld>
 </file>
 
@@ -3511,6 +3518,13 @@
   <p:clrMapOvr>
     <a:masterClrMapping/>
   </p:clrMapOvr>
+  <p:timing>
+    <p:tnLst>
+      <p:par>
+        <p:cTn id="1" dur="indefinite" restart="never" nodeType="tmRoot"/>
+      </p:par>
+    </p:tnLst>
+  </p:timing>
 </p:sld>
 </file>
 
@@ -3714,6 +3728,13 @@
   <p:clrMapOvr>
     <a:masterClrMapping/>
   </p:clrMapOvr>
+  <p:timing>
+    <p:tnLst>
+      <p:par>
+        <p:cTn id="1" dur="indefinite" restart="never" nodeType="tmRoot"/>
+      </p:par>
+    </p:tnLst>
+  </p:timing>
 </p:sld>
 </file>
 
@@ -3886,6 +3907,13 @@
   <p:clrMapOvr>
     <a:masterClrMapping/>
   </p:clrMapOvr>
+  <p:timing>
+    <p:tnLst>
+      <p:par>
+        <p:cTn id="1" dur="indefinite" restart="never" nodeType="tmRoot"/>
+      </p:par>
+    </p:tnLst>
+  </p:timing>
 </p:sld>
 </file>
 
@@ -4085,6 +4113,13 @@
   <p:clrMapOvr>
     <a:masterClrMapping/>
   </p:clrMapOvr>
+  <p:timing>
+    <p:tnLst>
+      <p:par>
+        <p:cTn id="1" dur="indefinite" restart="never" nodeType="tmRoot"/>
+      </p:par>
+    </p:tnLst>
+  </p:timing>
 </p:sld>
 </file>
 
@@ -4114,7 +4149,7 @@
         <p:spPr>
           <a:xfrm>
             <a:off x="0" y="93609"/>
-            <a:ext cx="9144000" cy="4949496"/>
+            <a:ext cx="9144000" cy="5078313"/>
           </a:xfrm>
           <a:prstGeom prst="rect">
             <a:avLst/>
@@ -4224,11 +4259,11 @@
               <a:t> </a:t>
             </a:r>
             <a:r>
-              <a:rPr lang="en-US" sz="5400" b="1" dirty="0" err="1"/>
+              <a:rPr lang="en-US" sz="5400" b="1" dirty="0" err="1" smtClean="0"/>
               <a:t>ny</a:t>
             </a:r>
             <a:r>
-              <a:rPr lang="en-US" sz="5400" b="1" dirty="0"/>
+              <a:rPr lang="en-US" sz="5400" b="1" dirty="0" smtClean="0"/>
               <a:t> </a:t>
             </a:r>
             <a:r>
@@ -4257,6 +4292,13 @@
   <p:clrMapOvr>
     <a:masterClrMapping/>
   </p:clrMapOvr>
+  <p:timing>
+    <p:tnLst>
+      <p:par>
+        <p:cTn id="1" dur="indefinite" restart="never" nodeType="tmRoot"/>
+      </p:par>
+    </p:tnLst>
+  </p:timing>
 </p:sld>
 </file>
 
